--- a/public/fun/pack/pptx/weddingpro/결혼식프리미엄_07_러브스토리중심_피치코퍼.pptx
+++ b/public/fun/pack/pptx/weddingpro/결혼식프리미엄_07_러브스토리중심_피치코퍼.pptx
@@ -113,12 +113,12 @@
   <p:extLst>
     <p:ext uri="{521415D9-36F7-43E2-AB2F-B90AF26B5E84}">
       <p14:sectionLst xmlns:p14="http://schemas.microsoft.com/office/powerpoint/2010/main">
-        <p14:section name="시작" id="{414FACD7-0D12-4B09-BE17-33D67760FB84}">
+        <p14:section name="시작" id="{C166DED1-5A1D-474E-BB4B-ABFF767EE571}">
           <p14:sldIdLst>
             <p14:sldId id="256"/>
           </p14:sldIdLst>
         </p14:section>
-        <p14:section name="본문" id="{27844923-7F2E-418D-A19A-82B3EA9161C8}">
+        <p14:section name="본문" id="{B3E5A5E8-6F3B-4B26-961E-C3D3D24BAAFE}">
           <p14:sldIdLst>
             <p14:sldId id="257"/>
             <p14:sldId id="258"/>
@@ -127,7 +127,7 @@
             <p14:sldId id="261"/>
           </p14:sldIdLst>
         </p14:section>
-        <p14:section name="마무리" id="{BC30AA0E-B00D-47F3-8834-2F2CF1271566}">
+        <p14:section name="마무리" id="{D7A739F6-5D45-4D65-9D61-F4C195D50EA3}">
           <p14:sldIdLst>
             <p14:sldId id="262"/>
           </p14:sldIdLst>
@@ -2879,7 +2879,7 @@
             </a:lvl1pPr>
           </a:lstStyle>
           <a:p>
-            <a:fld id="{CDAD7155-D5A6-4DA9-BB30-AA63620B99B7}" type="slidenum">
+            <a:fld id="{8A42D27D-A91C-4667-AD44-684FA2930288}" type="slidenum">
               <a:rPr lang="en-US"/>
               <a:t>‹#›</a:t>
             </a:fld>
@@ -4990,7 +4990,7 @@
             </a:lvl1pPr>
           </a:lstStyle>
           <a:p>
-            <a:fld id="{DE08C995-EECC-4E07-9621-19C718340DC2}" type="slidenum">
+            <a:fld id="{41941C23-2178-47AA-B3FB-A460A7A26C0E}" type="slidenum">
               <a:rPr lang="en-US"/>
               <a:t>‹#›</a:t>
             </a:fld>
@@ -5743,7 +5743,7 @@
             </a:lvl1pPr>
           </a:lstStyle>
           <a:p>
-            <a:fld id="{06D7F906-E5B3-4637-A031-A885C86F5A54}" type="slidenum">
+            <a:fld id="{62978902-3090-4A72-AF00-1BEB5ED67399}" type="slidenum">
               <a:rPr lang="en-US"/>
               <a:t>‹#›</a:t>
             </a:fld>
@@ -6697,7 +6697,7 @@
           <a:p>
             <a:r>
               <a:rPr lang="ko-KR"/>
-              <a:t>0000. 00. 00 · 예식장 이름</a:t>
+              <a:t>날짜 입력 · 예식장 이름</a:t>
             </a:r>
           </a:p>
         </p:txBody>
@@ -6932,7 +6932,7 @@
           <a:bodyPr/>
           <a:lstStyle/>
           <a:p>
-            <a:fld id="{AEE6265D-56CD-4DD8-AFAD-DA7715E4F71D}" type="slidenum">
+            <a:fld id="{E65ADC10-2C1C-4771-A1F0-35142607C70A}" type="slidenum">
               <a:rPr lang="en-US"/>
               <a:t>‹#›</a:t>
             </a:fld>
@@ -7376,7 +7376,7 @@
           <a:bodyPr/>
           <a:lstStyle/>
           <a:p>
-            <a:fld id="{07B2D241-84F1-4401-974F-97482497E9CB}" type="slidenum">
+            <a:fld id="{EE351467-1BB5-476D-A291-D1622ADED949}" type="slidenum">
               <a:rPr lang="en-US"/>
               <a:t>‹#›</a:t>
             </a:fld>
@@ -8218,7 +8218,7 @@
           <a:bodyPr/>
           <a:lstStyle/>
           <a:p>
-            <a:fld id="{FB380560-487B-4914-B60E-416BE4DD389B}" type="slidenum">
+            <a:fld id="{D4DD148D-3726-4462-923C-049E80287A1F}" type="slidenum">
               <a:rPr lang="en-US"/>
               <a:t>‹#›</a:t>
             </a:fld>
@@ -9780,7 +9780,7 @@
           <a:bodyPr/>
           <a:lstStyle/>
           <a:p>
-            <a:fld id="{E4782D4F-BF8B-412F-AF47-3E8D2174D0BE}" type="slidenum">
+            <a:fld id="{A049DB39-95E4-4580-BD9D-CBCB1C4DB08B}" type="slidenum">
               <a:rPr lang="en-US"/>
               <a:t>‹#›</a:t>
             </a:fld>
@@ -9868,7 +9868,7 @@
           <a:bodyPr/>
           <a:lstStyle/>
           <a:p>
-            <a:fld id="{FF34A9DF-66E9-4482-8E5A-767B9AA3C4FB}" type="slidenum">
+            <a:fld id="{CF15035C-6BDB-4301-AAC6-FB2935EDFFD2}" type="slidenum">
               <a:rPr lang="en-US"/>
               <a:t>‹#›</a:t>
             </a:fld>
